--- a/docs/instructions/Polish/EU_SAE_Workbench_Guide_3_Estimating_Poverty_and_Welfare_PL.pptx
+++ b/docs/instructions/Polish/EU_SAE_Workbench_Guide_3_Estimating_Poverty_and_Welfare_PL.pptx
@@ -1366,7 +1366,7 @@
           <a:p>
             <a:r>
               <a:rPr lang="pl-PL"/>
-              <a:t>Celem jest średnia arytmetyczna dobrobytu. UFH log stosuje wybraną opcję wariancji do wariancji delta V/mean^2; domyślne jest sm_all, a direct i sm_out pozostają dostępne i są zapisywane. MFH domyślnie używa sm_all / rho_sm_all na skali logarytmicznej. Opcjonalny próg sm_out pozostaje równy 0,001 na tej skali. Skorygowane predykcje UFH są niedostępne bez oszacowania bezpośredniego; none zwraca exp(eta). Historyczne wyniki zachowują wcześniejsze ustawienia.</a:t>
+              <a:t>Celem jest średnia arytmetyczna dobrobytu. UFH log stosuje wybraną opcję wariancji do wariancji delta V/mean^2; domyślne jest sm_out, a direct i sm_all pozostają dostępne i są zapisywane. MFH domyślnie używa sm_out / rho_sm_out na skali logarytmicznej. Próg sm_out pozostaje równy 0,001 na tej skali. Skorygowane predykcje UFH są niedostępne bez oszacowania bezpośredniego; none zwraca exp(eta). Historyczne wyniki zachowują wcześniejsze ustawienia.</a:t>
             </a:r>
             <a:endParaRPr lang="pl-PL"/>
           </a:p>
@@ -2246,7 +2246,7 @@
           <a:p>
             <a:r>
               <a:rPr lang="pl-PL"/>
-              <a:t>UFH FGT0 arcsin zachowuje analityczną wariancję opartą na efektywnej liczebności próby; jeśli ta liczebność jest nieprawidłowa, używana jest zaobserwowana liczebność próby. UFH bez transformacji domyślnie używa sm_all. Domyślne MFH to sm_all z rho_sm_all. Opcjonalne sm_out zastępuje tylko wariancje brakujące, nieskończone lub ściśle poniżej 0,001; nie zastępuje dużych wariancji. Jawnie zapisane wybory pozostają ważne. Przy estymacie na granicy dopuszczalnego zakresu istotność zmiany ma charakter wstępny. Historyczne przykłady w5o używały sm_out / rho_sm_out i 100 replikacji.</a:t>
+              <a:t>UFH FGT0 arcsin zachowuje analityczną wariancję opartą na efektywnej liczebności próby; jeśli ta liczebność jest nieprawidłowa, używana jest zaobserwowana liczebność próby. UFH bez transformacji domyślnie używa sm_out. Domyślne MFH to sm_out z rho_sm_out. sm_out zastępuje tylko wariancje brakujące, nieskończone lub ściśle poniżej 0,001; nie zastępuje dużych wariancji. Opcjonalne sm_all zastępuje wszystkie wariancje predykcjami GVF opartymi wyłącznie na liczebności próby, co może zawyżać wariancje obszarów o niskim ubóstwie i sprawiać, że RMSE MFH są niemal stałe (sekcja 6.6 wytycznych). Jawnie zapisane wybory pozostają ważne. Przy estymacie na granicy dopuszczalnego zakresu istotność zmiany ma charakter wstępny. Historyczne przykłady w5o używały sm_out / rho_sm_out i 100 replikacji.</a:t>
             </a:r>
             <a:endParaRPr lang="pl-PL"/>
           </a:p>
@@ -12204,7 +12204,7 @@
                           <a:ea typeface="Calibri" pitchFamily="34" charset="-122"/>
                           <a:cs typeface="Calibri" pitchFamily="34" charset="-120"/>
                         </a:rPr>
-                        <a:t>sm_all</a:t>
+                        <a:t>sm_out</a:t>
                       </a:r>
                       <a:endParaRPr lang="pl-PL" sz="1200">
                         <a:latin typeface="Calibri" charset="0"/>
@@ -12272,7 +12272,7 @@
                           <a:ea typeface="Calibri" pitchFamily="34" charset="-122"/>
                           <a:cs typeface="Calibri" pitchFamily="34" charset="-120"/>
                         </a:rPr>
-                        <a:t>UFH log uwzględnia wybór; MFH używa rho_sm_all</a:t>
+                        <a:t>UFH log uwzględnia wybór; MFH używa rho_sm_out</a:t>
                       </a:r>
                       <a:endParaRPr lang="pl-PL" sz="1200">
                         <a:latin typeface="Calibri" charset="0"/>
@@ -12569,7 +12569,7 @@
                   <a:srgbClr val="5B6B86"/>
                 </a:solidFill>
               </a:rPr>
-              <a:t>Historyczne w5o: sm_out / rho_sm_out, 100 replikacji. Nowych ustawień nie uruchomiono.</a:t>
+              <a:t>Historyczne w5o: sm_out / rho_sm_out (obecne ustawienia domyślne), 100 replikacji.</a:t>
             </a:r>
             <a:endParaRPr lang="pl-PL" sz="1400"/>
           </a:p>
@@ -20171,7 +20171,7 @@
                           <a:ea typeface="Calibri" pitchFamily="34" charset="-122"/>
                           <a:cs typeface="Calibri" pitchFamily="34" charset="-120"/>
                         </a:rPr>
-                        <a:t>sm_all, rho_sm_all</a:t>
+                        <a:t>sm_out, rho_sm_out</a:t>
                       </a:r>
                       <a:endParaRPr lang="pl-PL" sz="1200">
                         <a:latin typeface="Calibri" charset="0"/>
@@ -20239,7 +20239,7 @@
                           <a:ea typeface="Calibri" pitchFamily="34" charset="-122"/>
                           <a:cs typeface="Calibri" pitchFamily="34" charset="-120"/>
                         </a:rPr>
-                        <a:t>Pełne wygładzanie wariancji roboczych i krajowa korelacja błędów losowania</a:t>
+                        <a:t>Wariancje bezpośrednie (GVF poniżej 0,001) i krajowa korelacja błędów losowania</a:t>
                       </a:r>
                       <a:endParaRPr lang="pl-PL" sz="1200">
                         <a:latin typeface="Calibri" charset="0"/>
@@ -20948,7 +20948,7 @@
                   <a:srgbClr val="5B6B86"/>
                 </a:solidFill>
               </a:rPr>
-              <a:t>Historyczny przykład w5o: sm_out / rho_sm_out, 100 replikacji. Nie są to wyniki nowych ustawień.</a:t>
+              <a:t>Historyczny przykład w5o: sm_out / rho_sm_out (obecne ustawienia domyślne), 100 replikacji.</a:t>
             </a:r>
             <a:endParaRPr lang="pl-PL" sz="1400"/>
           </a:p>

--- a/docs/instructions/Polish/EU_SAE_Workbench_Guide_3_Estimating_Poverty_and_Welfare_PL.pptx
+++ b/docs/instructions/Polish/EU_SAE_Workbench_Guide_3_Estimating_Poverty_and_Welfare_PL.pptx
@@ -9450,19 +9450,13 @@
               <a:buSzPct val="100000"/>
               <a:buChar char="•"/>
             </a:pPr>
-            <a:pPr indent="0" marL="0">
-              <a:spcAft>
-                <a:spcPts val="600"/>
-              </a:spcAft>
-              <a:buNone/>
-            </a:pPr>
             <a:r>
               <a:rPr lang="pl-PL" sz="1250" b="1">
                 <a:solidFill>
                   <a:srgbClr val="16233D"/>
                 </a:solidFill>
               </a:rPr>
-              <a:t xml:space="preserve">Indeks o stałej podstawie: </a:t>
+              <a:t>Indeks o stałej podstawie: </a:t>
             </a:r>
             <a:r>
               <a:rPr lang="pl-PL" sz="1250">
@@ -9482,19 +9476,13 @@
               <a:buSzPct val="100000"/>
               <a:buChar char="•"/>
             </a:pPr>
-            <a:pPr indent="0" marL="0">
-              <a:spcAft>
-                <a:spcPts val="600"/>
-              </a:spcAft>
-              <a:buNone/>
-            </a:pPr>
             <a:r>
               <a:rPr lang="pl-PL" sz="1250" b="1">
                 <a:solidFill>
                   <a:srgbClr val="16233D"/>
                 </a:solidFill>
               </a:rPr>
-              <a:t xml:space="preserve">Formaty roczne: </a:t>
+              <a:t>Formaty roczne: </a:t>
             </a:r>
             <a:r>
               <a:rPr lang="pl-PL" sz="1250">
@@ -9514,19 +9502,13 @@
               <a:buSzPct val="100000"/>
               <a:buChar char="•"/>
             </a:pPr>
-            <a:pPr indent="0" marL="0">
-              <a:spcAft>
-                <a:spcPts val="600"/>
-              </a:spcAft>
-              <a:buNone/>
-            </a:pPr>
             <a:r>
               <a:rPr lang="pl-PL" sz="1250" b="1">
                 <a:solidFill>
                   <a:srgbClr val="16233D"/>
                 </a:solidFill>
               </a:rPr>
-              <a:t xml:space="preserve">Plik CPI: </a:t>
+              <a:t>Plik CPI: </a:t>
             </a:r>
             <a:r>
               <a:rPr lang="pl-PL" sz="1250">
@@ -16086,19 +16068,13 @@
               <a:buSzPct val="100000"/>
               <a:buChar char="•"/>
             </a:pPr>
-            <a:pPr indent="0" marL="0">
-              <a:spcAft>
-                <a:spcPts val="600"/>
-              </a:spcAft>
-              <a:buNone/>
-            </a:pPr>
             <a:r>
               <a:rPr lang="pl-PL" sz="1200" b="1">
                 <a:solidFill>
                   <a:srgbClr val="16233D"/>
                 </a:solidFill>
               </a:rPr>
-              <a:t xml:space="preserve">Zakres rewizji: </a:t>
+              <a:t>Zakres rewizji: </a:t>
             </a:r>
             <a:r>
               <a:rPr lang="pl-PL" sz="1200">
@@ -16118,19 +16094,13 @@
               <a:buSzPct val="100000"/>
               <a:buChar char="•"/>
             </a:pPr>
-            <a:pPr indent="0" marL="0">
-              <a:spcAft>
-                <a:spcPts val="600"/>
-              </a:spcAft>
-              <a:buNone/>
-            </a:pPr>
             <a:r>
               <a:rPr lang="pl-PL" sz="1200" b="1">
                 <a:solidFill>
                   <a:srgbClr val="16233D"/>
                 </a:solidFill>
               </a:rPr>
-              <a:t xml:space="preserve">Odpowiedzialność urzędu: </a:t>
+              <a:t>Odpowiedzialność urzędu: </a:t>
             </a:r>
             <a:r>
               <a:rPr lang="pl-PL" sz="1200">
@@ -16150,19 +16120,13 @@
               <a:buSzPct val="100000"/>
               <a:buChar char="•"/>
             </a:pPr>
-            <a:pPr indent="0" marL="0">
-              <a:spcAft>
-                <a:spcPts val="600"/>
-              </a:spcAft>
-              <a:buNone/>
-            </a:pPr>
             <a:r>
               <a:rPr lang="pl-PL" sz="1200" b="1">
                 <a:solidFill>
                   <a:srgbClr val="16233D"/>
                 </a:solidFill>
               </a:rPr>
-              <a:t xml:space="preserve">Niepewność zmiany: </a:t>
+              <a:t>Niepewność zmiany: </a:t>
             </a:r>
             <a:r>
               <a:rPr lang="pl-PL" sz="1200">
@@ -17912,16 +17876,13 @@
             <a:pPr indent="0" marL="0">
               <a:buNone/>
             </a:pPr>
-            <a:pPr indent="0" marL="0">
-              <a:buNone/>
-            </a:pPr>
             <a:r>
               <a:rPr lang="pl-PL" sz="1200" b="1">
                 <a:solidFill>
                   <a:srgbClr val="33415C"/>
                 </a:solidFill>
               </a:rPr>
-              <a:t xml:space="preserve">Liczą się tylko ilorazy między latami. </a:t>
+              <a:t>Liczą się tylko ilorazy między latami. </a:t>
             </a:r>
             <a:r>
               <a:rPr lang="pl-PL" sz="1200">
@@ -21090,19 +21051,13 @@
               <a:buSzPct val="100000"/>
               <a:buChar char="•"/>
             </a:pPr>
-            <a:pPr indent="0" marL="0">
-              <a:spcAft>
-                <a:spcPts val="600"/>
-              </a:spcAft>
-              <a:buNone/>
-            </a:pPr>
             <a:r>
               <a:rPr lang="pl-PL" sz="1200" b="1">
                 <a:solidFill>
                   <a:srgbClr val="16233D"/>
                 </a:solidFill>
               </a:rPr>
-              <a:t xml:space="preserve">Wiersze: </a:t>
+              <a:t>Wiersze: </a:t>
             </a:r>
             <a:r>
               <a:rPr lang="pl-PL" sz="1200">
@@ -21122,19 +21077,13 @@
               <a:buSzPct val="100000"/>
               <a:buChar char="•"/>
             </a:pPr>
-            <a:pPr indent="0" marL="0">
-              <a:spcAft>
-                <a:spcPts val="600"/>
-              </a:spcAft>
-              <a:buNone/>
-            </a:pPr>
             <a:r>
               <a:rPr lang="pl-PL" sz="1200" b="1">
                 <a:solidFill>
                   <a:srgbClr val="16233D"/>
                 </a:solidFill>
               </a:rPr>
-              <a:t xml:space="preserve">Zmiany: </a:t>
+              <a:t>Zmiany: </a:t>
             </a:r>
             <a:r>
               <a:rPr lang="pl-PL" sz="1200">
@@ -21154,19 +21103,13 @@
               <a:buSzPct val="100000"/>
               <a:buChar char="•"/>
             </a:pPr>
-            <a:pPr indent="0" marL="0">
-              <a:spcAft>
-                <a:spcPts val="600"/>
-              </a:spcAft>
-              <a:buNone/>
-            </a:pPr>
             <a:r>
               <a:rPr lang="pl-PL" sz="1200" b="1">
                 <a:solidFill>
                   <a:srgbClr val="16233D"/>
                 </a:solidFill>
               </a:rPr>
-              <a:t xml:space="preserve">Pliki: </a:t>
+              <a:t>Pliki: </a:t>
             </a:r>
             <a:r>
               <a:rPr lang="pl-PL" sz="1200">
